--- a/docs/2026-2학기-통계독서탐구-수행평가/발표예시.pptx
+++ b/docs/2026-2학기-통계독서탐구-수행평가/발표예시.pptx
@@ -110,7 +110,7 @@
   <p:extLst>
     <p:ext uri="{521415D9-36F7-43E2-AB2F-B90AF26B5E84}">
       <p14:sectionLst xmlns:p14="http://schemas.microsoft.com/office/powerpoint/2010/main">
-        <p14:section name="발표" id="{8b84432f-c1f6-4331-c726-223cc1dbb22b}">
+        <p14:section name="발표" id="{1022718b-10fa-57f0-2f13-3ab2b9c160b1}">
           <p14:sldIdLst>
             <p14:sldId id="256"/>
             <p14:sldId id="257"/>

--- a/docs/2026-2학기-통계독서탐구-수행평가/발표예시.pptx
+++ b/docs/2026-2학기-통계독서탐구-수행평가/발표예시.pptx
@@ -110,7 +110,7 @@
   <p:extLst>
     <p:ext uri="{521415D9-36F7-43E2-AB2F-B90AF26B5E84}">
       <p14:sectionLst xmlns:p14="http://schemas.microsoft.com/office/powerpoint/2010/main">
-        <p14:section name="발표" id="{1022718b-10fa-57f0-2f13-3ab2b9c160b1}">
+        <p14:section name="발표" id="{77ad1d26-4c33-b0e3-33dc-4c44e771971f}">
           <p14:sldIdLst>
             <p14:sldId id="256"/>
             <p14:sldId id="257"/>
@@ -139,7 +139,7 @@
           <a:lstStyle/>
           <a:p>
             <a:pPr>
-              <a:defRPr sz="1200" b="0" i="0" u="none" strike="noStrike">
+              <a:defRPr sz="1050" b="0" i="0" u="none" strike="noStrike">
                 <a:solidFill>
                   <a:srgbClr val="1B211D"/>
                 </a:solidFill>
@@ -147,7 +147,7 @@
               </a:defRPr>
             </a:pPr>
             <a:r>
-              <a:rPr sz="1200" b="0" i="0" u="none" strike="noStrike">
+              <a:rPr sz="1050" b="0" i="0" u="none" strike="noStrike">
                 <a:solidFill>
                   <a:srgbClr val="1B211D"/>
                 </a:solidFill>
@@ -175,7 +175,7 @@
               <c:strCache>
                 <c:ptCount val="1"/>
                 <c:pt idx="0">
-                  <c:v>출생아 수(만 명)</c:v>
+                  <c:v>출생아 수</c:v>
                 </c:pt>
               </c:strCache>
             </c:strRef>
@@ -201,7 +201,7 @@
               <a:lstStyle/>
               <a:p>
                 <a:pPr>
-                  <a:defRPr b="0" i="0" strike="noStrike" sz="1000" u="none">
+                  <a:defRPr b="0" i="0" strike="noStrike" sz="850" u="none">
                     <a:solidFill>
                       <a:srgbClr val="1B211D"/>
                     </a:solidFill>
@@ -221,7 +221,7 @@
           </c:dLbls>
           <c:marker>
             <c:symbol val="circle"/>
-            <c:size val="8"/>
+            <c:size val="6"/>
             <c:spPr>
               <a:solidFill>
                 <a:srgbClr val="2A78D6"/>
@@ -300,7 +300,7 @@
             <a:lstStyle/>
             <a:p>
               <a:pPr>
-                <a:defRPr b="0" i="0" strike="noStrike" sz="1000" u="none">
+                <a:defRPr b="0" i="0" strike="noStrike" sz="850" u="none">
                   <a:solidFill>
                     <a:srgbClr val="1B211D"/>
                   </a:solidFill>
@@ -348,7 +348,7 @@
           <a:lstStyle/>
           <a:p>
             <a:pPr>
-              <a:defRPr sz="1000" b="0" i="0" u="none" strike="noStrike">
+              <a:defRPr sz="900" b="0" i="0" u="none" strike="noStrike">
                 <a:solidFill>
                   <a:srgbClr val="52514E"/>
                 </a:solidFill>
@@ -402,7 +402,7 @@
           <a:lstStyle/>
           <a:p>
             <a:pPr>
-              <a:defRPr sz="1000" b="0" i="0" u="none" strike="noStrike">
+              <a:defRPr sz="900" b="0" i="0" u="none" strike="noStrike">
                 <a:solidFill>
                   <a:srgbClr val="52514E"/>
                 </a:solidFill>
@@ -836,7 +836,7 @@
           <a:p>
             <a:r>
               <a:rPr lang="en-US" dirty="0"/>
-              <a:t>[20초] 안녕하세요, 2학년 1반 1번 홍길동입니다. 제 주장은 "출생아 수는 2024년부터 다시 늘고 있고, 출생을 늘리려면 결혼을 쉽게 하는 지원이 먼저다"입니다. 참고한 책은 대럴 허프의 《새빨간 거짓말, 통계》입니다. 이 책은 표본이 치우치면 결과가 틀린다고 말하는데, 제 자료는 출생신고 전체를 집계한 것이라 그 문제가 없다는 점을 먼저 확인했습니다.</a:t>
+              <a:t>주장과 참고한 책을 말합니다.</a:t>
             </a:r>
             <a:endParaRPr lang="en-US" dirty="0"/>
           </a:p>
@@ -924,7 +924,7 @@
           <a:p>
             <a:r>
               <a:rPr lang="en-US" dirty="0"/>
-              <a:t>[40초] 자료는 국가데이터처, 옛 통계청의 인구동향조사 출생 통계입니다. KOSIS에서 "출생아 수"로 검색해 찾았고, 화면은 이 캡처입니다. 이 조사는 출생신고서 전체를 집계하므로 일부를 뽑은 표본조사가 아니라 모두를 조사한 전수조사입니다. 원자료에는 월별, 시도별 숫자가 많아서 2020년부터 2025년까지 연도별 출생아 수만 골라 만 명 단위로 표를 다시 만들었습니다.</a:t>
+              <a:t>자료는 국가데이터처의 인구동향조사 출생 통계입니다. 출생신고서 전체를 집계한 전수 자료이고, 연도별 출생아 수만 골라 만 명 단위로 표를 다시 만들었습니다.</a:t>
             </a:r>
             <a:endParaRPr lang="en-US" dirty="0"/>
           </a:p>
@@ -1012,7 +1012,7 @@
           <a:p>
             <a:r>
               <a:rPr lang="en-US" dirty="0"/>
-              <a:t>[40초] 표를 꺾은선 그래프로 그렸습니다. 세로축은 0부터 시작해 변화가 과장되지 않게 했습니다. 숫자로 보면 2020년 27.2만 명에서 2023년 23.0만 명으로 4.2만 명, 약 15% 줄었고, 2023년부터 2025년 25.4만 명까지 2.4만 명, 약 10% 늘었습니다. 저는 그 이유가 결혼에 있다고 봅니다. 같은 기관의 혼인·이혼 통계를 보면 혼인 건수는 2022년 19.2만 건으로 가장 적었다가 2024년 22.2만 건으로 14.8% 늘었고, 출생아 수는 그 1년 뒤에 늘었습니다.</a:t>
+              <a:t>세로축은 0부터 시작했습니다. 2020년 27.2만 명에서 2023년 23.0만 명으로 약 15% 줄었고, 2025년 25.4만 명까지 약 10% 늘었습니다. 혼인 건수가 먼저 움직이고 출생이 1년 뒤 따라왔습니다.</a:t>
             </a:r>
             <a:endParaRPr lang="en-US" dirty="0"/>
           </a:p>
@@ -1100,7 +1100,7 @@
           <a:p>
             <a:r>
               <a:rPr lang="en-US" dirty="0"/>
-              <a:t>[20초] 정리하면, 통계가 보여 준 것은 출생아 수가 혼인 건수를 1~2년 뒤따라 움직인다는 것입니다. 그래서 저는 아이를 낳은 뒤의 지원보다 결혼 자체를 쉽게 하는 지원이 먼저라고 주장합니다. 남는 궁금증은 2025년 혼인 건수인데, 이것이 늘었다면 2026년 출생아 수도 늘 것이라고 예측할 수 있습니다. 이상입니다.</a:t>
+              <a:t>출생아 수는 혼인 건수를 1~2년 뒤따라 움직입니다. 그래서 결혼을 쉽게 하는 지원이 먼저라고 주장합니다. 대책의 효과는 혼인 건수로 먼저 평가하자고 제안합니다.</a:t>
             </a:r>
             <a:endParaRPr lang="en-US" dirty="0"/>
           </a:p>
@@ -1273,7 +1273,7 @@
                   <a:schemeClr val="accent3"/>
                 </a:solidFill>
               </a:rPr>
-              <a:t>통계독서탐구 · 2학년 확률과 통계 수행평가 · 2분 발표</a:t>
+              <a:t>통계독서탐구 · 2학년 확률과 통계 수행평가</a:t>
             </a:r>
             <a:endParaRPr lang="en-US" sz="900" dirty="0"/>
           </a:p>
@@ -1319,6 +1319,166 @@
             <a:fld id="{F7021451-1387-4CA6-816F-3879F97B5CBC}" type="slidenum">
               <a:rPr b="0" lang="en-US"/>
               <a:t>1002</a:t>
+            </a:fld>
+            <a:endParaRPr lang="en-US"/>
+          </a:p>
+        </p:txBody>
+      </p:sp>
+    </p:spTree>
+  </p:cSld>
+  <p:clrMapOvr>
+    <a:masterClrMapping/>
+  </p:clrMapOvr>
+</p:sldLayout>
+</file>
+
+<file path=ppt/slideLayouts/slideLayout3.xml><?xml version="1.0" encoding="utf-8"?>
+<p:sldLayout xmlns:a="http://schemas.openxmlformats.org/drawingml/2006/main" xmlns:r="http://schemas.openxmlformats.org/officeDocument/2006/relationships" xmlns:p="http://schemas.openxmlformats.org/presentationml/2006/main" preserve="1">
+  <p:cSld name="EXPLAIN">
+    <p:bg>
+      <p:bgPr>
+        <a:solidFill>
+          <a:srgbClr val="EEF3EF"/>
+        </a:solidFill>
+      </p:bgPr>
+    </p:bg>
+    <p:spTree>
+      <p:nvGrpSpPr>
+        <p:cNvPr id="1" name=""/>
+        <p:cNvGrpSpPr/>
+        <p:nvPr/>
+      </p:nvGrpSpPr>
+      <p:grpSpPr>
+        <a:xfrm>
+          <a:off x="0" y="0"/>
+          <a:ext cx="0" cy="0"/>
+          <a:chOff x="0" y="0"/>
+          <a:chExt cx="0" cy="0"/>
+        </a:xfrm>
+      </p:grpSpPr>
+      <p:sp>
+        <p:nvSpPr>
+          <p:cNvPr id="2" name="Text 0"/>
+          <p:cNvSpPr/>
+          <p:nvPr>
+            <p:ph idx="100" type="title" hasCustomPrompt="1"/>
+          </p:nvPr>
+        </p:nvSpPr>
+        <p:spPr>
+          <a:xfrm>
+            <a:off x="960120" y="274320"/>
+            <a:ext cx="7726680" cy="548640"/>
+          </a:xfrm>
+          <a:prstGeom prst="rect">
+            <a:avLst/>
+          </a:prstGeom>
+          <a:noFill/>
+          <a:ln/>
+        </p:spPr>
+        <p:txBody>
+          <a:bodyPr wrap="square" rtlCol="0"/>
+          <a:lstStyle>
+            <a:lvl1pPr algn="l" indent="0" marL="0">
+              <a:buNone/>
+              <a:defRPr lang="en-US" sz="2400" b="1" dirty="0">
+                <a:solidFill>
+                  <a:schemeClr val="tx2"/>
+                </a:solidFill>
+              </a:defRPr>
+            </a:lvl1pPr>
+          </a:lstStyle>
+          <a:p>
+            <a:pPr algn="l" indent="0" marL="0">
+              <a:buNone/>
+            </a:pPr>
+            <a:r>
+              <a:rPr lang="en-US" sz="2400" b="1" dirty="0">
+                <a:solidFill>
+                  <a:schemeClr val="tx2"/>
+                </a:solidFill>
+              </a:rPr>
+              <a:t>제목</a:t>
+            </a:r>
+            <a:endParaRPr lang="en-US" sz="2400" dirty="0"/>
+          </a:p>
+        </p:txBody>
+      </p:sp>
+      <p:sp>
+        <p:nvSpPr>
+          <p:cNvPr id="3" name="Text 0"/>
+          <p:cNvSpPr txBox="1"/>
+          <p:nvPr/>
+        </p:nvSpPr>
+        <p:spPr>
+          <a:xfrm>
+            <a:off x="457200" y="4754880"/>
+            <a:ext cx="5943600" cy="228600"/>
+          </a:xfrm>
+          <a:prstGeom prst="rect">
+            <a:avLst/>
+          </a:prstGeom>
+          <a:noFill/>
+          <a:ln/>
+        </p:spPr>
+        <p:txBody>
+          <a:bodyPr wrap="square" lIns="0" tIns="0" rIns="0" bIns="0" rtlCol="0" anchor="ctr"/>
+          <a:lstStyle/>
+          <a:p>
+            <a:pPr indent="0" marL="0">
+              <a:buNone/>
+            </a:pPr>
+            <a:r>
+              <a:rPr lang="en-US" sz="900" dirty="0">
+                <a:solidFill>
+                  <a:schemeClr val="accent3"/>
+                </a:solidFill>
+              </a:rPr>
+              <a:t>통계독서탐구 · 2학년 확률과 통계 수행평가</a:t>
+            </a:r>
+            <a:endParaRPr lang="en-US" sz="900" dirty="0"/>
+          </a:p>
+        </p:txBody>
+      </p:sp>
+      <p:sp>
+        <p:nvSpPr>
+          <p:cNvPr id="25" name="Slide Number Placeholder 0"/>
+          <p:cNvSpPr>
+            <a:spLocks noGrp="1"/>
+          </p:cNvSpPr>
+          <p:nvPr>
+            <p:ph type="sldNum" sz="quarter" idx="4294967295"/>
+          </p:nvPr>
+        </p:nvSpPr>
+        <p:spPr>
+          <a:xfrm>
+            <a:off x="8229600" y="4754880"/>
+            <a:ext cx="457200" cy="228600"/>
+          </a:xfrm>
+          <a:prstGeom prst="rect">
+            <a:avLst/>
+          </a:prstGeom>
+          <a:extLst>
+            <a:ext uri="{C572A759-6A51-4108-AA02-DFA0A04FC94B}">
+              <ma14:wrappingTextBoxFlag xmlns:ma14="http://schemas.microsoft.com/office/mac/drawingml/2011/main" val="0"/>
+            </a:ext>
+          </a:extLst>
+        </p:spPr>
+        <p:txBody>
+          <a:bodyPr/>
+          <a:lstStyle>
+            <a:lvl1pPr>
+              <a:defRPr sz="900">
+                <a:solidFill>
+                  <a:srgbClr val="6B6759"/>
+                </a:solidFill>
+              </a:defRPr>
+            </a:lvl1pPr>
+          </a:lstStyle>
+          <a:p>
+            <a:pPr algn="r"/>
+            <a:fld id="{F7021451-1387-4CA6-816F-3879F97B5CBC}" type="slidenum">
+              <a:rPr b="0" lang="en-US"/>
+              <a:t>1003</a:t>
             </a:fld>
             <a:endParaRPr lang="en-US"/>
           </a:p>
@@ -1400,6 +1560,7 @@
   <p:sldLayoutIdLst>
     <p:sldLayoutId id="2147483649" r:id="rId1"/>
     <p:sldLayoutId id="2147483650" r:id="rId2"/>
+    <p:sldLayoutId id="2147483651" r:id="rId3"/>
   </p:sldLayoutIdLst>
   <p:hf sldNum="0" hdr="0" ftr="0" dt="0"/>
   <p:txStyles>
@@ -2359,14 +2520,14 @@
               <a:buNone/>
             </a:pPr>
             <a:r>
-              <a:rPr lang="en-US" sz="1100" dirty="0">
+              <a:rPr lang="en-US" sz="1000" dirty="0">
                 <a:solidFill>
                   <a:schemeClr val="accent3"/>
                 </a:solidFill>
               </a:rPr>
               <a:t>연도별 합계만 골라 다시 만든 표 (단위: 만 명)</a:t>
             </a:r>
-            <a:endParaRPr lang="en-US" sz="1100" dirty="0"/>
+            <a:endParaRPr lang="en-US" sz="1000" dirty="0"/>
           </a:p>
         </p:txBody>
       </p:sp>
@@ -3267,14 +3428,14 @@
               <a:buNone/>
             </a:pPr>
             <a:r>
-              <a:rPr lang="en-US" sz="1100" dirty="0">
+              <a:rPr lang="en-US" sz="1000" dirty="0">
                 <a:solidFill>
                   <a:schemeClr val="accent3"/>
                 </a:solidFill>
               </a:rPr>
               <a:t>2020년에서 2023년까지 줄다가 2024년부터 2년 연속 늘었다</a:t>
             </a:r>
-            <a:endParaRPr lang="en-US" sz="1100" dirty="0"/>
+            <a:endParaRPr lang="en-US" sz="1000" dirty="0"/>
           </a:p>
         </p:txBody>
       </p:sp>
@@ -3544,7 +3705,7 @@
       </p:sp>
       <p:graphicFrame>
         <p:nvGraphicFramePr>
-          <p:cNvPr id="5" name="출생아 수 꺾은선 그래프" descr=""/>
+          <p:cNvPr id="5" name="연도별 출생아 수 (단위: 만 명)" descr=""/>
           <p:cNvGraphicFramePr/>
           <p:nvPr/>
         </p:nvGraphicFramePr>
@@ -4289,7 +4450,7 @@
                   <a:schemeClr val="tx2"/>
                 </a:solidFill>
               </a:rPr>
-              <a:t>남는 궁금증</a:t>
+              <a:t>제안</a:t>
             </a:r>
             <a:endParaRPr lang="en-US" sz="1100" dirty="0"/>
           </a:p>
@@ -4327,7 +4488,7 @@
                   <a:schemeClr val="tx1"/>
                 </a:solidFill>
               </a:rPr>
-              <a:t>2025년 혼인 건수가 늘었다면 2026년 출생아 수도 늘 것이라고 예측할 수 있다.</a:t>
+              <a:t>저출생 대책의 효과는 출생아 수보다 1~2년 앞서 움직이는 혼인 건수로 먼저 평가하자.</a:t>
             </a:r>
             <a:endParaRPr lang="en-US" sz="1800" dirty="0"/>
           </a:p>

--- a/docs/2026-2학기-통계독서탐구-수행평가/발표예시.pptx
+++ b/docs/2026-2학기-통계독서탐구-수행평가/발표예시.pptx
@@ -110,7 +110,7 @@
   <p:extLst>
     <p:ext uri="{521415D9-36F7-43E2-AB2F-B90AF26B5E84}">
       <p14:sectionLst xmlns:p14="http://schemas.microsoft.com/office/powerpoint/2010/main">
-        <p14:section name="발표" id="{77ad1d26-4c33-b0e3-33dc-4c44e771971f}">
+        <p14:section name="발표" id="{bc8d5053-5929-7814-c51b-b66e4a5625cb}">
           <p14:sldIdLst>
             <p14:sldId id="256"/>
             <p14:sldId id="257"/>

--- a/docs/2026-2학기-통계독서탐구-수행평가/발표예시.pptx
+++ b/docs/2026-2학기-통계독서탐구-수행평가/발표예시.pptx
@@ -110,7 +110,7 @@
   <p:extLst>
     <p:ext uri="{521415D9-36F7-43E2-AB2F-B90AF26B5E84}">
       <p14:sectionLst xmlns:p14="http://schemas.microsoft.com/office/powerpoint/2010/main">
-        <p14:section name="발표" id="{bc8d5053-5929-7814-c51b-b66e4a5625cb}">
+        <p14:section name="발표" id="{5f6b7fbf-d78a-f5f4-3055-86855d9814e8}">
           <p14:sldIdLst>
             <p14:sldId id="256"/>
             <p14:sldId id="257"/>
@@ -1100,7 +1100,7 @@
           <a:p>
             <a:r>
               <a:rPr lang="en-US" dirty="0"/>
-              <a:t>출생아 수는 혼인 건수를 1~2년 뒤따라 움직입니다. 그래서 결혼을 쉽게 하는 지원이 먼저라고 주장합니다. 대책의 효과는 혼인 건수로 먼저 평가하자고 제안합니다.</a:t>
+              <a:t>출생아 수는 혼인 건수를 1~2년 뒤따라 움직입니다. 그래서 결혼을 쉽게 하는 지원이 먼저라고 결론 내립니다.</a:t>
             </a:r>
             <a:endParaRPr lang="en-US" dirty="0"/>
           </a:p>
@@ -2402,11 +2402,11 @@
         <p:spPr>
           <a:xfrm>
             <a:off x="457200" y="1005840"/>
-            <a:ext cx="4114800" cy="1417320"/>
+            <a:ext cx="4114800" cy="1554480"/>
           </a:xfrm>
           <a:prstGeom prst="roundRect">
             <a:avLst>
-              <a:gd name="adj" fmla="val 5161"/>
+              <a:gd name="adj" fmla="val 4706"/>
             </a:avLst>
           </a:prstGeom>
           <a:solidFill>
@@ -2428,8 +2428,8 @@
         </p:nvSpPr>
         <p:spPr>
           <a:xfrm>
-            <a:off x="640080" y="1143000"/>
-            <a:ext cx="3749040" cy="1188720"/>
+            <a:off x="640080" y="1097280"/>
+            <a:ext cx="3749040" cy="1371600"/>
           </a:xfrm>
           <a:prstGeom prst="rect">
             <a:avLst/>
@@ -2445,53 +2445,70 @@
           <a:p>
             <a:pPr indent="0" marL="0">
               <a:spcAft>
-                <a:spcPts val="400"/>
+                <a:spcPts val="300"/>
               </a:spcAft>
               <a:buNone/>
             </a:pPr>
             <a:r>
-              <a:rPr lang="en-US" sz="1300" dirty="0">
+              <a:rPr lang="en-US" sz="1200" dirty="0">
                 <a:solidFill>
                   <a:schemeClr val="tx1"/>
                 </a:solidFill>
               </a:rPr>
               <a:t>기관: 국가데이터처(옛 통계청)</a:t>
             </a:r>
-            <a:endParaRPr lang="en-US" sz="1300" dirty="0"/>
+            <a:endParaRPr lang="en-US" sz="1200" dirty="0"/>
           </a:p>
           <a:p>
             <a:pPr indent="0" marL="0">
               <a:spcAft>
-                <a:spcPts val="400"/>
+                <a:spcPts val="300"/>
               </a:spcAft>
               <a:buNone/>
             </a:pPr>
             <a:r>
-              <a:rPr lang="en-US" sz="1300" dirty="0">
+              <a:rPr lang="en-US" sz="1200" dirty="0">
                 <a:solidFill>
                   <a:schemeClr val="tx1"/>
                 </a:solidFill>
               </a:rPr>
               <a:t>조사 이름: 「인구동향조사」 출생 통계</a:t>
             </a:r>
-            <a:endParaRPr lang="en-US" sz="1300" dirty="0"/>
+            <a:endParaRPr lang="en-US" sz="1200" dirty="0"/>
           </a:p>
           <a:p>
             <a:pPr indent="0" marL="0">
               <a:spcAft>
-                <a:spcPts val="400"/>
+                <a:spcPts val="300"/>
               </a:spcAft>
               <a:buNone/>
             </a:pPr>
             <a:r>
-              <a:rPr lang="en-US" sz="1300" dirty="0">
+              <a:rPr lang="en-US" sz="1200" dirty="0">
                 <a:solidFill>
                   <a:schemeClr val="tx1"/>
                 </a:solidFill>
               </a:rPr>
               <a:t>조사 방식: 모두 조사(전수). 출생신고서 전체를 집계</a:t>
             </a:r>
-            <a:endParaRPr lang="en-US" sz="1300" dirty="0"/>
+            <a:endParaRPr lang="en-US" sz="1200" dirty="0"/>
+          </a:p>
+          <a:p>
+            <a:pPr indent="0" marL="0">
+              <a:spcAft>
+                <a:spcPts val="300"/>
+              </a:spcAft>
+              <a:buNone/>
+            </a:pPr>
+            <a:r>
+              <a:rPr lang="en-US" sz="1200" dirty="0">
+                <a:solidFill>
+                  <a:schemeClr val="tx1"/>
+                </a:solidFill>
+              </a:rPr>
+              <a:t>얻는 길: kosis.kr → '출생아 수' 검색 → 인구동향조사</a:t>
+            </a:r>
+            <a:endParaRPr lang="en-US" sz="1200" dirty="0"/>
           </a:p>
         </p:txBody>
       </p:sp>
@@ -2503,7 +2520,7 @@
         </p:nvSpPr>
         <p:spPr>
           <a:xfrm>
-            <a:off x="457200" y="2560320"/>
+            <a:off x="457200" y="2651760"/>
             <a:ext cx="4114800" cy="256032"/>
           </a:xfrm>
           <a:prstGeom prst="rect">
@@ -2546,7 +2563,7 @@
           </p:nvPr>
         </p:nvGraphicFramePr>
         <p:xfrm>
-          <a:off x="457200" y="2852928"/>
+          <a:off x="457200" y="2926080"/>
           <a:ext cx="4114800" cy="914400"/>
         </p:xfrm>
         <a:graphic>
@@ -3411,7 +3428,7 @@
         </p:nvSpPr>
         <p:spPr>
           <a:xfrm>
-            <a:off x="457200" y="3657600"/>
+            <a:off x="457200" y="3703320"/>
             <a:ext cx="4114800" cy="457200"/>
           </a:xfrm>
           <a:prstGeom prst="rect">
@@ -3877,7 +3894,7 @@
                   <a:schemeClr val="tx2"/>
                 </a:solidFill>
               </a:rPr>
-              <a:t>② 왜 그렇게 되었을까, 내 의견</a:t>
+              <a:t>② 의견 또는 추측</a:t>
             </a:r>
             <a:endParaRPr lang="en-US" sz="1100" dirty="0"/>
           </a:p>
@@ -3915,7 +3932,7 @@
                   <a:schemeClr val="tx1"/>
                 </a:solidFill>
               </a:rPr>
-              <a:t>결혼이 줄었다 늘어난 것이 1~2년 뒤 출생에 나타났다. 코로나19 때 미룬 결혼이 2023~2024년에 몰렸다</a:t>
+              <a:t>결혼이 줄었다 늘어난 것이 1~2년 뒤 출생에 나타났다고 본다. 코로나19 때 미룬 결혼이 2023~2024년에 몰렸다</a:t>
             </a:r>
             <a:endParaRPr lang="en-US" sz="1050" dirty="0"/>
           </a:p>
@@ -3978,7 +3995,7 @@
                   <a:schemeClr val="tx2"/>
                 </a:solidFill>
               </a:rPr>
-              <a:t>③ 내 의견의 근거</a:t>
+              <a:t>③ 의견·추측의 근거</a:t>
             </a:r>
             <a:endParaRPr lang="en-US" sz="1100" dirty="0"/>
           </a:p>
@@ -4199,12 +4216,12 @@
         </p:nvSpPr>
         <p:spPr>
           <a:xfrm>
-            <a:off x="457200" y="1005840"/>
-            <a:ext cx="8229600" cy="1051560"/>
+            <a:off x="457200" y="960120"/>
+            <a:ext cx="8229600" cy="1115568"/>
           </a:xfrm>
           <a:prstGeom prst="roundRect">
             <a:avLst>
-              <a:gd name="adj" fmla="val 6957"/>
+              <a:gd name="adj" fmla="val 6557"/>
             </a:avLst>
           </a:prstGeom>
           <a:solidFill>
@@ -4226,7 +4243,7 @@
         </p:nvSpPr>
         <p:spPr>
           <a:xfrm>
-            <a:off x="685800" y="1115568"/>
+            <a:off x="685800" y="1051560"/>
             <a:ext cx="7772400" cy="274320"/>
           </a:xfrm>
           <a:prstGeom prst="rect">
@@ -4262,8 +4279,8 @@
         </p:nvSpPr>
         <p:spPr>
           <a:xfrm>
-            <a:off x="685800" y="1417320"/>
-            <a:ext cx="7772400" cy="548640"/>
+            <a:off x="685800" y="1344168"/>
+            <a:ext cx="7772400" cy="685800"/>
           </a:xfrm>
           <a:prstGeom prst="rect">
             <a:avLst/>
@@ -4281,14 +4298,14 @@
               <a:buNone/>
             </a:pPr>
             <a:r>
-              <a:rPr lang="en-US" sz="1800" dirty="0">
+              <a:rPr lang="en-US" sz="1400" dirty="0">
                 <a:solidFill>
                   <a:schemeClr val="tx1"/>
                 </a:solidFill>
               </a:rPr>
-              <a:t>출생아 수는 혼인 건수를 1~2년 뒤따라 움직인다.</a:t>
-            </a:r>
-            <a:endParaRPr lang="en-US" sz="1800" dirty="0"/>
+              <a:t>출생아 수는 2020년 27.2만 명에서 2023년 23.0만 명으로 줄었다가 2025년 25.4만 명으로 2년 연속 늘었다.</a:t>
+            </a:r>
+            <a:endParaRPr lang="en-US" sz="1400" dirty="0"/>
           </a:p>
         </p:txBody>
       </p:sp>
@@ -4301,11 +4318,11 @@
         <p:spPr>
           <a:xfrm>
             <a:off x="457200" y="2194560"/>
-            <a:ext cx="8229600" cy="1051560"/>
+            <a:ext cx="8229600" cy="1115568"/>
           </a:xfrm>
           <a:prstGeom prst="roundRect">
             <a:avLst>
-              <a:gd name="adj" fmla="val 6957"/>
+              <a:gd name="adj" fmla="val 6557"/>
             </a:avLst>
           </a:prstGeom>
           <a:solidFill>
@@ -4327,7 +4344,7 @@
         </p:nvSpPr>
         <p:spPr>
           <a:xfrm>
-            <a:off x="685800" y="2304288"/>
+            <a:off x="685800" y="2286000"/>
             <a:ext cx="7772400" cy="274320"/>
           </a:xfrm>
           <a:prstGeom prst="rect">
@@ -4349,7 +4366,7 @@
                   <a:schemeClr val="tx2"/>
                 </a:solidFill>
               </a:rPr>
-              <a:t>그래서 나의 주장</a:t>
+              <a:t>통계 분석</a:t>
             </a:r>
             <a:endParaRPr lang="en-US" sz="1100" dirty="0"/>
           </a:p>
@@ -4363,8 +4380,8 @@
         </p:nvSpPr>
         <p:spPr>
           <a:xfrm>
-            <a:off x="685800" y="2606040"/>
-            <a:ext cx="7772400" cy="548640"/>
+            <a:off x="685800" y="2578608"/>
+            <a:ext cx="7772400" cy="685800"/>
           </a:xfrm>
           <a:prstGeom prst="rect">
             <a:avLst/>
@@ -4382,14 +4399,14 @@
               <a:buNone/>
             </a:pPr>
             <a:r>
-              <a:rPr lang="en-US" sz="1800" dirty="0">
+              <a:rPr lang="en-US" sz="1400" dirty="0">
                 <a:solidFill>
                   <a:schemeClr val="tx1"/>
                 </a:solidFill>
               </a:rPr>
-              <a:t>아이를 낳은 뒤의 지원보다 결혼 자체를 쉽게 하는 지원(신혼부부 주거 등)이 먼저다.</a:t>
-            </a:r>
-            <a:endParaRPr lang="en-US" sz="1800" dirty="0"/>
+              <a:t>출생아 수는 혼인 건수를 1~2년 뒤따라 움직인다. 혼인이 2022년 바닥을 찍고 2024년 14.8% 늘었으니 2026년 출생아 수도 늘 가능성이 크다.</a:t>
+            </a:r>
+            <a:endParaRPr lang="en-US" sz="1400" dirty="0"/>
           </a:p>
         </p:txBody>
       </p:sp>
@@ -4401,12 +4418,12 @@
         </p:nvSpPr>
         <p:spPr>
           <a:xfrm>
-            <a:off x="457200" y="3383280"/>
-            <a:ext cx="8229600" cy="1051560"/>
+            <a:off x="457200" y="3429000"/>
+            <a:ext cx="8229600" cy="1115568"/>
           </a:xfrm>
           <a:prstGeom prst="roundRect">
             <a:avLst>
-              <a:gd name="adj" fmla="val 6957"/>
+              <a:gd name="adj" fmla="val 6557"/>
             </a:avLst>
           </a:prstGeom>
           <a:solidFill>
@@ -4428,7 +4445,7 @@
         </p:nvSpPr>
         <p:spPr>
           <a:xfrm>
-            <a:off x="685800" y="3493008"/>
+            <a:off x="685800" y="3520440"/>
             <a:ext cx="7772400" cy="274320"/>
           </a:xfrm>
           <a:prstGeom prst="rect">
@@ -4450,7 +4467,7 @@
                   <a:schemeClr val="tx2"/>
                 </a:solidFill>
               </a:rPr>
-              <a:t>제안</a:t>
+              <a:t>결론</a:t>
             </a:r>
             <a:endParaRPr lang="en-US" sz="1100" dirty="0"/>
           </a:p>
@@ -4464,8 +4481,8 @@
         </p:nvSpPr>
         <p:spPr>
           <a:xfrm>
-            <a:off x="685800" y="3794760"/>
-            <a:ext cx="7772400" cy="548640"/>
+            <a:off x="685800" y="3813048"/>
+            <a:ext cx="7772400" cy="685800"/>
           </a:xfrm>
           <a:prstGeom prst="rect">
             <a:avLst/>
@@ -4483,14 +4500,14 @@
               <a:buNone/>
             </a:pPr>
             <a:r>
-              <a:rPr lang="en-US" sz="1800" dirty="0">
+              <a:rPr lang="en-US" sz="1400" dirty="0">
                 <a:solidFill>
                   <a:schemeClr val="tx1"/>
                 </a:solidFill>
               </a:rPr>
-              <a:t>저출생 대책의 효과는 출생아 수보다 1~2년 앞서 움직이는 혼인 건수로 먼저 평가하자.</a:t>
-            </a:r>
-            <a:endParaRPr lang="en-US" sz="1800" dirty="0"/>
+              <a:t>아이를 낳은 뒤의 지원보다 결혼 자체를 쉽게 하는 지원(신혼부부 주거 등)이 먼저다. 저출생 대책의 효과는 1~2년 앞서 움직이는 혼인 건수로 먼저 평가하자.</a:t>
+            </a:r>
+            <a:endParaRPr lang="en-US" sz="1400" dirty="0"/>
           </a:p>
         </p:txBody>
       </p:sp>

--- a/docs/2026-2학기-통계독서탐구-수행평가/발표예시.pptx
+++ b/docs/2026-2학기-통계독서탐구-수행평가/발표예시.pptx
@@ -110,7 +110,7 @@
   <p:extLst>
     <p:ext uri="{521415D9-36F7-43E2-AB2F-B90AF26B5E84}">
       <p14:sectionLst xmlns:p14="http://schemas.microsoft.com/office/powerpoint/2010/main">
-        <p14:section name="발표" id="{5f6b7fbf-d78a-f5f4-3055-86855d9814e8}">
+        <p14:section name="발표" id="{e1c77fe4-38fa-1d67-ea98-b84940dd740e}">
           <p14:sldIdLst>
             <p14:sldId id="256"/>
             <p14:sldId id="257"/>
@@ -2218,7 +2218,7 @@
                   <a:schemeClr val="tx1"/>
                 </a:solidFill>
               </a:rPr>
-              <a:t>표본이 치우치면 결과가 틀린다는 1장을 읽고, 내 자료가 출생신고 전체를 집계한 것인지 먼저 확인함</a:t>
+              <a:t>표본이 치우치면 결과가 틀린다는 조언을 따라, 내 자료가 출생신고 전체를 집계한 것인지 먼저 확인함</a:t>
             </a:r>
             <a:endParaRPr lang="en-US" sz="1200" dirty="0"/>
           </a:p>

--- a/docs/2026-2학기-통계독서탐구-수행평가/발표예시.pptx
+++ b/docs/2026-2학기-통계독서탐구-수행평가/발표예시.pptx
@@ -110,7 +110,7 @@
   <p:extLst>
     <p:ext uri="{521415D9-36F7-43E2-AB2F-B90AF26B5E84}">
       <p14:sectionLst xmlns:p14="http://schemas.microsoft.com/office/powerpoint/2010/main">
-        <p14:section name="발표" id="{e1c77fe4-38fa-1d67-ea98-b84940dd740e}">
+        <p14:section name="발표" id="{693604fb-4cbc-cca6-8136-e44898107ecb}">
           <p14:sldIdLst>
             <p14:sldId id="256"/>
             <p14:sldId id="257"/>
